--- a/companies/hollowell-ip/Engagements/Odonnell Inc/2019.07.05 - Briefing Deck - Odonnell Inc.pptx
+++ b/companies/hollowell-ip/Engagements/Odonnell Inc/2019.07.05 - Briefing Deck - Odonnell Inc.pptx
@@ -3114,7 +3114,7 @@
                   <a:srgbClr val="1E4D2B"/>
                 </a:solidFill>
               </a:rPr>
-              <a:t>Patent Portfolio Review for Odonnell Inc</a:t>
+              <a:t>Patent Portfolio Review: Odonnell Inc</a:t>
             </a:r>
           </a:p>
         </p:txBody>
@@ -3141,25 +3141,25 @@
           <a:p>
             <a:pPr lvl="1"/>
             <a:r>
-              <a:t>Progress briefing prepared for Gary Smith, General Manager</a:t>
+              <a:t>Status briefing for Gary Smith, General Manager.</a:t>
             </a:r>
           </a:p>
           <a:p>
             <a:pPr lvl="1"/>
             <a:r>
-              <a:t>Engagement commenced May 13, 2019</a:t>
+              <a:t>Review under way since May 13, 2019.</a:t>
             </a:r>
           </a:p>
           <a:p>
             <a:pPr lvl="1"/>
             <a:r>
-              <a:t>Review led by Heather Munoz, Partner</a:t>
+              <a:t>Prepared by Kelly Snyder, Patent Agent.</a:t>
             </a:r>
           </a:p>
           <a:p>
             <a:pPr lvl="1"/>
             <a:r>
-              <a:t>Prepared by Kelly Snyder, Patent Agent</a:t>
+              <a:t>Privileged and confidential. Attorney-client communication.</a:t>
             </a:r>
           </a:p>
         </p:txBody>
@@ -3203,7 +3203,7 @@
                   <a:srgbClr val="1E4D2B"/>
                 </a:solidFill>
               </a:rPr>
-              <a:t>What We Are Reviewing</a:t>
+              <a:t>Where the Work Stands</a:t>
             </a:r>
           </a:p>
         </p:txBody>
@@ -3225,31 +3225,25 @@
           <a:p>
             <a:pPr lvl="1"/>
             <a:r>
-              <a:t>Every patent and pending application in the portfolio, taken one family at a time</a:t>
+              <a:t>Docket reconciled against patent office records. Your records and theirs agree on every open deadline.</a:t>
             </a:r>
           </a:p>
           <a:p>
             <a:pPr lvl="1"/>
             <a:r>
-              <a:t>Docketed dates reconciled against the office record for each family</a:t>
+              <a:t>Maintenance fee on the older patent paid on your instruction. That patent stays in the review like any other.</a:t>
             </a:r>
           </a:p>
           <a:p>
             <a:pPr lvl="1"/>
             <a:r>
-              <a:t>Prosecution history and the current claim scope, family by family</a:t>
+              <a:t>Earliest-filed families reviewed. Pending applications are next.</a:t>
             </a:r>
           </a:p>
           <a:p>
             <a:pPr lvl="1"/>
             <a:r>
-              <a:t>Any filing, response, or decision that is coming due</a:t>
-            </a:r>
-          </a:p>
-          <a:p>
-            <a:pPr lvl="1"/>
-            <a:r>
-              <a:t>What sits outside the review: no new filings and no office-action responses under this engagement</a:t>
+              <a:t>Title review under way. Current product list received; claim mapping started.</a:t>
             </a:r>
           </a:p>
         </p:txBody>
@@ -3293,7 +3287,7 @@
                   <a:srgbClr val="1E4D2B"/>
                 </a:solidFill>
               </a:rPr>
-              <a:t>How the Review Runs</a:t>
+              <a:t>How Each Family Is Assessed</a:t>
             </a:r>
           </a:p>
         </p:txBody>
@@ -3315,31 +3309,31 @@
           <a:p>
             <a:pPr lvl="1"/>
             <a:r>
-              <a:t>Families are reviewed in docket order, the closest deadlines first</a:t>
+              <a:t>Legal status and remaining term.</a:t>
             </a:r>
           </a:p>
           <a:p>
             <a:pPr lvl="1"/>
             <a:r>
-              <a:t>Kelly Snyder keeps the portfolio docket current and reconciles every date against the office record</a:t>
+              <a:t>Maintenance fees and annuities due through end of term.</a:t>
             </a:r>
           </a:p>
           <a:p>
             <a:pPr lvl="1"/>
             <a:r>
-              <a:t>Amanda Schwartz reconciles each file history and flags gaps for retrieval</a:t>
+              <a:t>Chain of title as recorded, checked against the inventor agreements.</a:t>
             </a:r>
           </a:p>
           <a:p>
             <a:pPr lvl="1"/>
             <a:r>
-              <a:t>Heather Munoz reviews claim scope and prosecution posture and owns the conclusions</a:t>
+              <a:t>Claim coverage of current and planned products.</a:t>
             </a:r>
           </a:p>
           <a:p>
             <a:pPr lvl="1"/>
             <a:r>
-              <a:t>One master date list governs the work, reconciled weekly</a:t>
+              <a:t>One recommendation per family: maintain, continue, or let lapse.</a:t>
             </a:r>
           </a:p>
         </p:txBody>
@@ -3383,7 +3377,7 @@
                   <a:srgbClr val="1E4D2B"/>
                 </a:solidFill>
               </a:rPr>
-              <a:t>Where the Work Stands</a:t>
+              <a:t>Early Observations</a:t>
             </a:r>
           </a:p>
         </p:txBody>
@@ -3405,31 +3399,31 @@
           <a:p>
             <a:pPr lvl="1"/>
             <a:r>
-              <a:t>The portfolio is pulled and fully docketed</a:t>
+              <a:t>Older issued families are largely in order.</a:t>
             </a:r>
           </a:p>
           <a:p>
             <a:pPr lvl="1"/>
             <a:r>
-              <a:t>File-history reconciliation is under way, the larger families first</a:t>
+              <a:t>Some may not justify their next maintenance payment. No recommendation yet.</a:t>
             </a:r>
           </a:p>
           <a:p>
             <a:pPr lvl="1"/>
             <a:r>
-              <a:t>The first substantive review passes are beginning</a:t>
+              <a:t>Recorded inventor assignments are incomplete on some older families.</a:t>
             </a:r>
           </a:p>
           <a:p>
             <a:pPr lvl="1"/>
             <a:r>
-              <a:t>No docket date is currently at risk</a:t>
+              <a:t>Most title gaps look curable by corrective assignment. That depends on the inventor agreements.</a:t>
             </a:r>
           </a:p>
           <a:p>
             <a:pPr lvl="1"/>
             <a:r>
-              <a:t>Observations only at this stage; no conclusions are offered yet</a:t>
+              <a:t>All observations are provisional until Heather Munoz signs off.</a:t>
             </a:r>
           </a:p>
         </p:txBody>
@@ -3473,7 +3467,7 @@
                   <a:srgbClr val="1E4D2B"/>
                 </a:solidFill>
               </a:rPr>
-              <a:t>What the Review Will Deliver</a:t>
+              <a:t>Team</a:t>
             </a:r>
           </a:p>
         </p:txBody>
@@ -3495,31 +3489,19 @@
           <a:p>
             <a:pPr lvl="1"/>
             <a:r>
-              <a:t>A single written review, organized family by family</a:t>
+              <a:t>Heather Munoz, Partner. Supervises the review and signs the final report.</a:t>
             </a:r>
           </a:p>
           <a:p>
             <a:pPr lvl="1"/>
             <a:r>
-              <a:t>The docket confirmed against the office record, with any correction noted and sourced</a:t>
+              <a:t>Kelly Snyder, Patent Agent. Day-to-day contact; prosecution histories and claims.</a:t>
             </a:r>
           </a:p>
           <a:p>
             <a:pPr lvl="1"/>
             <a:r>
-              <a:t>Claim scope and prosecution posture summarized for each family</a:t>
-            </a:r>
-          </a:p>
-          <a:p>
-            <a:pPr lvl="1"/>
-            <a:r>
-              <a:t>Deadlines identified early enough to be acted on deliberately</a:t>
-            </a:r>
-          </a:p>
-          <a:p>
-            <a:pPr lvl="1"/>
-            <a:r>
-              <a:t>The decisions we believe Odonnell Inc should weigh</a:t>
+              <a:t>Amanda Schwartz, Associate. Chain of title and product mapping.</a:t>
             </a:r>
           </a:p>
         </p:txBody>
@@ -3563,7 +3545,7 @@
                   <a:srgbClr val="1E4D2B"/>
                 </a:solidFill>
               </a:rPr>
-              <a:t>What Comes Next</a:t>
+              <a:t>What We Need in July</a:t>
             </a:r>
           </a:p>
         </p:txBody>
@@ -3585,31 +3567,31 @@
           <a:p>
             <a:pPr lvl="1"/>
             <a:r>
-              <a:t>Complete the file-history reconciliation across the portfolio</a:t>
+              <a:t>Gary Smith: planned releases for the next two years.</a:t>
             </a:r>
           </a:p>
           <a:p>
             <a:pPr lvl="1"/>
             <a:r>
-              <a:t>Work through the substantive review in docket order</a:t>
+              <a:t>Gary Smith: the name of the officer who signs corrective assignments for the company.</a:t>
             </a:r>
           </a:p>
           <a:p>
             <a:pPr lvl="1"/>
             <a:r>
-              <a:t>Retrieve any documents missing from the histories</a:t>
+              <a:t>Amanda Schwartz: draft corrective assignments for your review.</a:t>
             </a:r>
           </a:p>
           <a:p>
             <a:pPr lvl="1"/>
             <a:r>
-              <a:t>Report any date at risk to Gary Smith the day it is identified</a:t>
+              <a:t>Kelly Snyder: finish the pending application families.</a:t>
             </a:r>
           </a:p>
           <a:p>
             <a:pPr lvl="1"/>
             <a:r>
-              <a:t>Hold the next briefing once the first families are through review</a:t>
+              <a:t>Working session on interim findings, to be scheduled with your office.</a:t>
             </a:r>
           </a:p>
         </p:txBody>
